--- a/Modul Minna 1/Bab 5/30. Minna 1 Tata Bahasa Bab 5 - Slide.pptx
+++ b/Modul Minna 1/Bab 5/30. Minna 1 Tata Bahasa Bab 5 - Slide.pptx
@@ -2572,7 +2572,7 @@
                 <a:ea typeface="Arial" pitchFamily="34" charset="-122"/>
                 <a:cs typeface="Arial" pitchFamily="34" charset="-120"/>
               </a:rPr>
-              <a:t>きょうとへいきます。</a:t>
+              <a:t>バンドンへいきます。</a:t>
             </a:r>
             <a:endParaRPr lang="en-US" sz="1700" dirty="0"/>
           </a:p>
@@ -2611,7 +2611,7 @@
                 <a:ea typeface="Arial" pitchFamily="34" charset="-122"/>
                 <a:cs typeface="Arial" pitchFamily="34" charset="-120"/>
               </a:rPr>
-              <a:t>Kyouto e ikimasu</a:t>
+              <a:t>Bandon e ikimasu</a:t>
             </a:r>
             <a:pPr indent="0" marL="0">
               <a:buNone/>
@@ -2639,7 +2639,7 @@
                 <a:ea typeface="Arial" pitchFamily="34" charset="-122"/>
                 <a:cs typeface="Arial" pitchFamily="34" charset="-120"/>
               </a:rPr>
-              <a:t>Pergi ke Kyoto.</a:t>
+              <a:t>Pergi ke Bandung.</a:t>
             </a:r>
             <a:endParaRPr lang="en-US" sz="950" dirty="0"/>
           </a:p>
@@ -5386,7 +5386,7 @@
                 <a:ea typeface="Arial" pitchFamily="34" charset="-122"/>
                 <a:cs typeface="Arial" pitchFamily="34" charset="-120"/>
               </a:rPr>
-              <a:t>このでんしゃはこうしえんへいきますよ。</a:t>
+              <a:t>このでんしゃはボゴールへいきますよ。</a:t>
             </a:r>
             <a:endParaRPr lang="en-US" sz="1700" dirty="0"/>
           </a:p>
@@ -5425,7 +5425,7 @@
                 <a:ea typeface="Arial" pitchFamily="34" charset="-122"/>
                 <a:cs typeface="Arial" pitchFamily="34" charset="-120"/>
               </a:rPr>
-              <a:t>kono densha wa Koushien e ikimasu yo</a:t>
+              <a:t>kono densha wa Bogooru e ikimasu yo</a:t>
             </a:r>
             <a:pPr indent="0" marL="0">
               <a:buNone/>
@@ -5453,7 +5453,7 @@
                 <a:ea typeface="Arial" pitchFamily="34" charset="-122"/>
                 <a:cs typeface="Arial" pitchFamily="34" charset="-120"/>
               </a:rPr>
-              <a:t>Kereta ini ke Koushien, lho.</a:t>
+              <a:t>Kereta ini ke Bogor, lho.</a:t>
             </a:r>
             <a:endParaRPr lang="en-US" sz="950" dirty="0"/>
           </a:p>
